--- a/Techstore_Presentation.pptx
+++ b/Techstore_Presentation.pptx
@@ -4569,7 +4569,7 @@
         </p:nvSpPr>
         <p:spPr>
           <a:xfrm>
-            <a:off x="0" y="0"/>
+            <a:off x="-231140" y="0"/>
             <a:ext cx="9144000" cy="5143500"/>
           </a:xfrm>
           <a:prstGeom prst="rect">
@@ -4581,6 +4581,12 @@
             </a:srgbClr>
           </a:solidFill>
         </p:spPr>
+        <p:txBody>
+          <a:bodyPr/>
+          <a:p>
+            <a:endParaRPr lang="en-US"/>
+          </a:p>
+        </p:txBody>
       </p:sp>
       <p:sp>
         <p:nvSpPr>
@@ -4676,44 +4682,6 @@
             <a:srgbClr val="7C3AED"/>
           </a:solidFill>
         </p:spPr>
-      </p:sp>
-      <p:sp>
-        <p:nvSpPr>
-          <p:cNvPr id="6" name="Text 4"/>
-          <p:cNvSpPr/>
-          <p:nvPr/>
-        </p:nvSpPr>
-        <p:spPr>
-          <a:xfrm>
-            <a:off x="0" y="3566160"/>
-            <a:ext cx="9144000" cy="457200"/>
-          </a:xfrm>
-          <a:prstGeom prst="rect">
-            <a:avLst/>
-          </a:prstGeom>
-          <a:noFill/>
-        </p:spPr>
-        <p:txBody>
-          <a:bodyPr wrap="square" rtlCol="0" anchor="ctr"/>
-          <a:lstStyle/>
-          <a:p>
-            <a:pPr marL="0" indent="0" algn="ctr">
-              <a:buNone/>
-            </a:pPr>
-            <a:r>
-              <a:rPr lang="en-US" sz="1800" dirty="0">
-                <a:solidFill>
-                  <a:srgbClr val="A78BFA"/>
-                </a:solidFill>
-                <a:latin typeface="Arial" panose="020B0604020202020204" pitchFamily="34" charset="0"/>
-                <a:ea typeface="Arial" panose="020B0604020202020204" pitchFamily="34" charset="-122"/>
-                <a:cs typeface="Arial" panose="020B0604020202020204" pitchFamily="34" charset="-120"/>
-              </a:rPr>
-              <a:t>Basmala Abdo</a:t>
-            </a:r>
-            <a:endParaRPr lang="en-US" sz="1800" dirty="0"/>
-          </a:p>
-        </p:txBody>
       </p:sp>
     </p:spTree>
   </p:cSld>
